--- a/curso_es/pptx/S24.pptx
+++ b/curso_es/pptx/S24.pptx
@@ -6793,7 +6793,7 @@
                           </a:solidFill>
                           <a:latin typeface="Nunito Sans"/>
                         </a:rPr>
-                        <a:t>Causa falsa (post hoc)</a:t>
+                        <a:t>Causa falsa</a:t>
                       </a:r>
                     </a:p>
                   </a:txBody>
@@ -6861,7 +6861,7 @@
                           </a:solidFill>
                           <a:latin typeface="Nunito Sans"/>
                         </a:rPr>
-                        <a:t>Apelación a la ignorancia (ad ignorantiam)</a:t>
+                        <a:t>Apelación a la ignorancia</a:t>
                       </a:r>
                     </a:p>
                   </a:txBody>
@@ -6929,7 +6929,7 @@
                           </a:solidFill>
                           <a:latin typeface="Nunito Sans"/>
                         </a:rPr>
-                        <a:t>Razonamiento circular (petitio principii)</a:t>
+                        <a:t>Razonamiento circular</a:t>
                       </a:r>
                     </a:p>
                   </a:txBody>
